--- a/itbi_packagelog.pptx
+++ b/itbi_packagelog.pptx
@@ -16,6 +16,7 @@
     <p:sldId id="265" r:id="rId10"/>
     <p:sldId id="266" r:id="rId11"/>
     <p:sldId id="267" r:id="rId12"/>
+    <p:sldId id="268" r:id="rId13"/>
   </p:sldIdLst>
   <p:sldSz cx="12192000" cy="6858000"/>
   <p:notesSz cx="6858000" cy="9144000"/>
@@ -123,12 +124,77 @@
     <p1510:client id="{1B6B34B3-CDA6-4935-8B7A-485047854E96}" v="214" dt="2026-01-14T10:06:44.768"/>
     <p1510:client id="{67097E2A-E7A9-4499-896D-4BD9E287EED2}" v="516" dt="2026-01-14T09:29:19.010"/>
     <p1510:client id="{8083A0F2-655A-4916-9933-910783F721A3}" v="18" dt="2026-01-14T10:09:57.098"/>
+    <p1510:client id="{D0BF7559-4C89-5C82-5003-EED3936F30E6}" v="63" dt="2026-01-14T19:35:19.599"/>
   </p1510:revLst>
 </p1510:revInfo>
 </file>
 
 <file path=ppt/changesInfos/changesInfo1.xml><?xml version="1.0" encoding="utf-8"?>
 <pc:chgInfo xmlns:a="http://schemas.openxmlformats.org/drawingml/2006/main" xmlns:r="http://schemas.openxmlformats.org/officeDocument/2006/relationships" xmlns:ac="http://schemas.microsoft.com/office/drawing/2013/main/command" xmlns:pc="http://schemas.microsoft.com/office/powerpoint/2013/main/command">
+  <pc:docChgLst>
+    <pc:chgData name="Gadam Gurban" userId="9fa804240d506e78" providerId="Windows Live" clId="Web-{D0BF7559-4C89-5C82-5003-EED3936F30E6}"/>
+    <pc:docChg chg="addSld modSld">
+      <pc:chgData name="Gadam Gurban" userId="9fa804240d506e78" providerId="Windows Live" clId="Web-{D0BF7559-4C89-5C82-5003-EED3936F30E6}" dt="2026-01-14T19:35:19.599" v="64" actId="20577"/>
+      <pc:docMkLst>
+        <pc:docMk/>
+      </pc:docMkLst>
+      <pc:sldChg chg="addSp modSp new mod modClrScheme chgLayout">
+        <pc:chgData name="Gadam Gurban" userId="9fa804240d506e78" providerId="Windows Live" clId="Web-{D0BF7559-4C89-5C82-5003-EED3936F30E6}" dt="2026-01-14T19:35:19.599" v="64" actId="20577"/>
+        <pc:sldMkLst>
+          <pc:docMk/>
+          <pc:sldMk cId="3724819114" sldId="268"/>
+        </pc:sldMkLst>
+        <pc:spChg chg="mod ord">
+          <ac:chgData name="Gadam Gurban" userId="9fa804240d506e78" providerId="Windows Live" clId="Web-{D0BF7559-4C89-5C82-5003-EED3936F30E6}" dt="2026-01-14T19:24:52.376" v="1"/>
+          <ac:spMkLst>
+            <pc:docMk/>
+            <pc:sldMk cId="3724819114" sldId="268"/>
+            <ac:spMk id="2" creationId="{9279EA2D-D8BB-77DA-E825-A89AEC04B443}"/>
+          </ac:spMkLst>
+        </pc:spChg>
+        <pc:spChg chg="mod ord">
+          <ac:chgData name="Gadam Gurban" userId="9fa804240d506e78" providerId="Windows Live" clId="Web-{D0BF7559-4C89-5C82-5003-EED3936F30E6}" dt="2026-01-14T19:24:52.376" v="1"/>
+          <ac:spMkLst>
+            <pc:docMk/>
+            <pc:sldMk cId="3724819114" sldId="268"/>
+            <ac:spMk id="3" creationId="{9759FA3B-7201-FA4B-D16F-EF9900FD7E32}"/>
+          </ac:spMkLst>
+        </pc:spChg>
+        <pc:spChg chg="mod ord">
+          <ac:chgData name="Gadam Gurban" userId="9fa804240d506e78" providerId="Windows Live" clId="Web-{D0BF7559-4C89-5C82-5003-EED3936F30E6}" dt="2026-01-14T19:24:52.376" v="1"/>
+          <ac:spMkLst>
+            <pc:docMk/>
+            <pc:sldMk cId="3724819114" sldId="268"/>
+            <ac:spMk id="4" creationId="{A28978ED-A9DE-0255-2014-BE819F45B85A}"/>
+          </ac:spMkLst>
+        </pc:spChg>
+        <pc:spChg chg="add mod ord">
+          <ac:chgData name="Gadam Gurban" userId="9fa804240d506e78" providerId="Windows Live" clId="Web-{D0BF7559-4C89-5C82-5003-EED3936F30E6}" dt="2026-01-14T19:29:52.842" v="56" actId="20577"/>
+          <ac:spMkLst>
+            <pc:docMk/>
+            <pc:sldMk cId="3724819114" sldId="268"/>
+            <ac:spMk id="5" creationId="{C3D2CFC0-0E6A-A391-9051-4AC15AB7B117}"/>
+          </ac:spMkLst>
+        </pc:spChg>
+        <pc:spChg chg="add mod ord">
+          <ac:chgData name="Gadam Gurban" userId="9fa804240d506e78" providerId="Windows Live" clId="Web-{D0BF7559-4C89-5C82-5003-EED3936F30E6}" dt="2026-01-14T19:29:39.388" v="52" actId="20577"/>
+          <ac:spMkLst>
+            <pc:docMk/>
+            <pc:sldMk cId="3724819114" sldId="268"/>
+            <ac:spMk id="6" creationId="{E4684C01-FBB2-7673-D2E4-11A9C18A771E}"/>
+          </ac:spMkLst>
+        </pc:spChg>
+        <pc:spChg chg="add mod ord">
+          <ac:chgData name="Gadam Gurban" userId="9fa804240d506e78" providerId="Windows Live" clId="Web-{D0BF7559-4C89-5C82-5003-EED3936F30E6}" dt="2026-01-14T19:35:19.599" v="64" actId="20577"/>
+          <ac:spMkLst>
+            <pc:docMk/>
+            <pc:sldMk cId="3724819114" sldId="268"/>
+            <ac:spMk id="7" creationId="{5257CE04-42D1-C2EF-7D26-F6C8D4A6CEB4}"/>
+          </ac:spMkLst>
+        </pc:spChg>
+      </pc:sldChg>
+    </pc:docChg>
+  </pc:docChgLst>
   <pc:docChgLst>
     <pc:chgData clId="Web-{1B6B34B3-CDA6-4935-8B7A-485047854E96}"/>
     <pc:docChg chg="modSld">
@@ -5203,6 +5269,572 @@
 </p:sld>
 </file>
 
+<file path=ppt/slides/slide12.xml><?xml version="1.0" encoding="utf-8"?>
+<p:sld xmlns:a="http://schemas.openxmlformats.org/drawingml/2006/main" xmlns:r="http://schemas.openxmlformats.org/officeDocument/2006/relationships" xmlns:p="http://schemas.openxmlformats.org/presentationml/2006/main">
+  <p:cSld>
+    <p:spTree>
+      <p:nvGrpSpPr>
+        <p:cNvPr id="1" name=""/>
+        <p:cNvGrpSpPr/>
+        <p:nvPr/>
+      </p:nvGrpSpPr>
+      <p:grpSpPr>
+        <a:xfrm>
+          <a:off x="0" y="0"/>
+          <a:ext cx="0" cy="0"/>
+          <a:chOff x="0" y="0"/>
+          <a:chExt cx="0" cy="0"/>
+        </a:xfrm>
+      </p:grpSpPr>
+      <p:sp>
+        <p:nvSpPr>
+          <p:cNvPr id="5" name="Title 4">
+            <a:extLst>
+              <a:ext uri="{FF2B5EF4-FFF2-40B4-BE49-F238E27FC236}">
+                <a16:creationId xmlns:a16="http://schemas.microsoft.com/office/drawing/2014/main" id="{C3D2CFC0-0E6A-A391-9051-4AC15AB7B117}"/>
+              </a:ext>
+            </a:extLst>
+          </p:cNvPr>
+          <p:cNvSpPr>
+            <a:spLocks noGrp="1"/>
+          </p:cNvSpPr>
+          <p:nvPr>
+            <p:ph type="title"/>
+          </p:nvPr>
+        </p:nvSpPr>
+        <p:spPr>
+          <a:xfrm>
+            <a:off x="881405" y="299921"/>
+            <a:ext cx="10439487" cy="648091"/>
+          </a:xfrm>
+        </p:spPr>
+        <p:txBody>
+          <a:bodyPr vert="horz" lIns="91440" tIns="45720" rIns="91440" bIns="45720" rtlCol="0" anchor="ctr">
+            <a:normAutofit/>
+          </a:bodyPr>
+          <a:lstStyle/>
+          <a:p>
+            <a:pPr algn="ctr"/>
+            <a:r>
+              <a:rPr lang="en-US" b="1" noProof="1">
+                <a:latin typeface="Times New Roman"/>
+                <a:cs typeface="Times New Roman"/>
+              </a:rPr>
+              <a:t>Distribuția Rolurilor și Contribuții</a:t>
+            </a:r>
+            <a:endParaRPr lang="en-US" b="1" noProof="1"/>
+          </a:p>
+        </p:txBody>
+      </p:sp>
+      <p:sp>
+        <p:nvSpPr>
+          <p:cNvPr id="6" name="Content Placeholder 5">
+            <a:extLst>
+              <a:ext uri="{FF2B5EF4-FFF2-40B4-BE49-F238E27FC236}">
+                <a16:creationId xmlns:a16="http://schemas.microsoft.com/office/drawing/2014/main" id="{E4684C01-FBB2-7673-D2E4-11A9C18A771E}"/>
+              </a:ext>
+            </a:extLst>
+          </p:cNvPr>
+          <p:cNvSpPr>
+            <a:spLocks noGrp="1"/>
+          </p:cNvSpPr>
+          <p:nvPr>
+            <p:ph sz="half" idx="1"/>
+          </p:nvPr>
+        </p:nvSpPr>
+        <p:spPr>
+          <a:xfrm>
+            <a:off x="877824" y="944095"/>
+            <a:ext cx="4977453" cy="5418218"/>
+          </a:xfrm>
+        </p:spPr>
+        <p:txBody>
+          <a:bodyPr vert="horz" lIns="91440" tIns="45720" rIns="91440" bIns="45720" rtlCol="0" anchor="t">
+            <a:noAutofit/>
+          </a:bodyPr>
+          <a:lstStyle/>
+          <a:p>
+            <a:pPr marL="0" indent="0">
+              <a:buNone/>
+            </a:pPr>
+            <a:r>
+              <a:rPr lang="en-US" sz="2400" b="1" noProof="1">
+                <a:latin typeface="Times New Roman"/>
+                <a:ea typeface="+mn-lt"/>
+                <a:cs typeface="+mn-lt"/>
+              </a:rPr>
+              <a:t>Gurbanov Gadam</a:t>
+            </a:r>
+            <a:endParaRPr lang="en-US" sz="2400" b="1" noProof="1"/>
+          </a:p>
+          <a:p>
+            <a:pPr marL="0" indent="0">
+              <a:buNone/>
+            </a:pPr>
+            <a:r>
+              <a:rPr lang="en-US" sz="1800" b="1" noProof="1">
+                <a:latin typeface="Times New Roman"/>
+                <a:ea typeface="+mn-lt"/>
+                <a:cs typeface="+mn-lt"/>
+              </a:rPr>
+              <a:t>Core Development &amp; Data Logic</a:t>
+            </a:r>
+            <a:endParaRPr lang="en-US" sz="1800" b="1" noProof="1">
+              <a:latin typeface="Times New Roman"/>
+              <a:cs typeface="Times New Roman"/>
+            </a:endParaRPr>
+          </a:p>
+          <a:p>
+            <a:r>
+              <a:rPr lang="en-US" sz="1800" b="1" noProof="1">
+                <a:latin typeface="Times New Roman"/>
+                <a:ea typeface="+mn-lt"/>
+                <a:cs typeface="+mn-lt"/>
+              </a:rPr>
+              <a:t>Dezvoltare Backend</a:t>
+            </a:r>
+            <a:endParaRPr lang="en-US" sz="1800" noProof="1">
+              <a:latin typeface="Times New Roman"/>
+              <a:cs typeface="Times New Roman"/>
+            </a:endParaRPr>
+          </a:p>
+          <a:p>
+            <a:pPr lvl="1"/>
+            <a:r>
+              <a:rPr lang="en-US" sz="1800" noProof="1">
+                <a:latin typeface="Times New Roman"/>
+                <a:ea typeface="+mn-lt"/>
+                <a:cs typeface="+mn-lt"/>
+              </a:rPr>
+              <a:t>Implementarea logicii centrale de procesare a logurilor (</a:t>
+            </a:r>
+            <a:r>
+              <a:rPr lang="en-US" sz="1800" noProof="1">
+                <a:latin typeface="Times New Roman"/>
+                <a:cs typeface="Times New Roman"/>
+              </a:rPr>
+              <a:t>process.sh</a:t>
+            </a:r>
+            <a:r>
+              <a:rPr lang="en-US" sz="1800" noProof="1">
+                <a:latin typeface="Times New Roman"/>
+                <a:ea typeface="+mn-lt"/>
+                <a:cs typeface="+mn-lt"/>
+              </a:rPr>
+              <a:t>) utilizând </a:t>
+            </a:r>
+            <a:r>
+              <a:rPr lang="en-US" sz="1800" noProof="1">
+                <a:latin typeface="Times New Roman"/>
+                <a:cs typeface="Times New Roman"/>
+              </a:rPr>
+              <a:t>awk</a:t>
+            </a:r>
+            <a:r>
+              <a:rPr lang="en-US" sz="1800" noProof="1">
+                <a:latin typeface="Times New Roman"/>
+                <a:ea typeface="+mn-lt"/>
+                <a:cs typeface="+mn-lt"/>
+              </a:rPr>
+              <a:t> și expresii regulate (RegEx).</a:t>
+            </a:r>
+            <a:endParaRPr lang="en-US" sz="1800" noProof="1">
+              <a:latin typeface="Times New Roman"/>
+              <a:cs typeface="Times New Roman"/>
+            </a:endParaRPr>
+          </a:p>
+          <a:p>
+            <a:r>
+              <a:rPr lang="en-US" sz="1800" b="1" noProof="1">
+                <a:latin typeface="Times New Roman"/>
+                <a:ea typeface="+mn-lt"/>
+                <a:cs typeface="+mn-lt"/>
+              </a:rPr>
+              <a:t>Interfața CLI (Frontend)</a:t>
+            </a:r>
+            <a:endParaRPr lang="en-US" sz="1800" noProof="1">
+              <a:latin typeface="Times New Roman"/>
+              <a:cs typeface="Times New Roman"/>
+            </a:endParaRPr>
+          </a:p>
+          <a:p>
+            <a:pPr lvl="1"/>
+            <a:r>
+              <a:rPr lang="en-US" sz="1800" noProof="1">
+                <a:latin typeface="Times New Roman"/>
+                <a:ea typeface="+mn-lt"/>
+                <a:cs typeface="+mn-lt"/>
+              </a:rPr>
+              <a:t>Crearea interfeței de comandă (</a:t>
+            </a:r>
+            <a:r>
+              <a:rPr lang="en-US" sz="1800" noProof="1">
+                <a:latin typeface="Times New Roman"/>
+                <a:cs typeface="Times New Roman"/>
+              </a:rPr>
+              <a:t>packagelog.sh</a:t>
+            </a:r>
+            <a:r>
+              <a:rPr lang="en-US" sz="1800" noProof="1">
+                <a:latin typeface="Times New Roman"/>
+                <a:ea typeface="+mn-lt"/>
+                <a:cs typeface="+mn-lt"/>
+              </a:rPr>
+              <a:t>) și gestionarea parametrilor de intrare pentru utilizator.</a:t>
+            </a:r>
+            <a:endParaRPr lang="en-US" sz="1800" noProof="1">
+              <a:latin typeface="Times New Roman"/>
+              <a:cs typeface="Times New Roman"/>
+            </a:endParaRPr>
+          </a:p>
+          <a:p>
+            <a:r>
+              <a:rPr lang="en-US" sz="1800" b="1" noProof="1">
+                <a:latin typeface="Times New Roman"/>
+                <a:ea typeface="+mn-lt"/>
+                <a:cs typeface="+mn-lt"/>
+              </a:rPr>
+              <a:t>Arhitectura Datelor</a:t>
+            </a:r>
+            <a:endParaRPr lang="en-US" sz="1800" noProof="1">
+              <a:latin typeface="Times New Roman"/>
+              <a:cs typeface="Times New Roman"/>
+            </a:endParaRPr>
+          </a:p>
+          <a:p>
+            <a:pPr lvl="1"/>
+            <a:r>
+              <a:rPr lang="en-US" sz="1800" noProof="1">
+                <a:latin typeface="Times New Roman"/>
+                <a:ea typeface="+mn-lt"/>
+                <a:cs typeface="+mn-lt"/>
+              </a:rPr>
+              <a:t>Proiectarea structurii bazei de date </a:t>
+            </a:r>
+            <a:r>
+              <a:rPr lang="en-US" sz="1800" noProof="1">
+                <a:latin typeface="Times New Roman"/>
+                <a:cs typeface="Times New Roman"/>
+              </a:rPr>
+              <a:t>.db</a:t>
+            </a:r>
+            <a:r>
+              <a:rPr lang="en-US" sz="1800" noProof="1">
+                <a:latin typeface="Times New Roman"/>
+                <a:ea typeface="+mn-lt"/>
+                <a:cs typeface="+mn-lt"/>
+              </a:rPr>
+              <a:t> și a algoritmilor de filtrare/sortare a pachetelor.</a:t>
+            </a:r>
+            <a:endParaRPr lang="en-US" sz="1800" noProof="1">
+              <a:latin typeface="Times New Roman"/>
+              <a:cs typeface="Times New Roman"/>
+            </a:endParaRPr>
+          </a:p>
+          <a:p>
+            <a:endParaRPr lang="en-US" sz="1800" noProof="1">
+              <a:latin typeface="Times New Roman"/>
+              <a:cs typeface="Times New Roman"/>
+            </a:endParaRPr>
+          </a:p>
+        </p:txBody>
+      </p:sp>
+      <p:sp>
+        <p:nvSpPr>
+          <p:cNvPr id="7" name="Content Placeholder 6">
+            <a:extLst>
+              <a:ext uri="{FF2B5EF4-FFF2-40B4-BE49-F238E27FC236}">
+                <a16:creationId xmlns:a16="http://schemas.microsoft.com/office/drawing/2014/main" id="{5257CE04-42D1-C2EF-7D26-F6C8D4A6CEB4}"/>
+              </a:ext>
+            </a:extLst>
+          </p:cNvPr>
+          <p:cNvSpPr>
+            <a:spLocks noGrp="1"/>
+          </p:cNvSpPr>
+          <p:nvPr>
+            <p:ph sz="half" idx="2"/>
+          </p:nvPr>
+        </p:nvSpPr>
+        <p:spPr>
+          <a:xfrm>
+            <a:off x="6328391" y="944095"/>
+            <a:ext cx="4985785" cy="5418218"/>
+          </a:xfrm>
+        </p:spPr>
+        <p:txBody>
+          <a:bodyPr vert="horz" lIns="91440" tIns="45720" rIns="91440" bIns="45720" rtlCol="0" anchor="t">
+            <a:noAutofit/>
+          </a:bodyPr>
+          <a:lstStyle/>
+          <a:p>
+            <a:pPr marL="0" indent="0">
+              <a:buNone/>
+            </a:pPr>
+            <a:r>
+              <a:rPr lang="en-US" sz="2400" b="1" noProof="1">
+                <a:latin typeface="Times New Roman"/>
+                <a:ea typeface="+mn-lt"/>
+                <a:cs typeface="+mn-lt"/>
+              </a:rPr>
+              <a:t>Merdanov Ylham</a:t>
+            </a:r>
+          </a:p>
+          <a:p>
+            <a:pPr marL="0" indent="0">
+              <a:buNone/>
+            </a:pPr>
+            <a:r>
+              <a:rPr lang="en-US" sz="1800" b="1" noProof="1">
+                <a:latin typeface="Times New Roman"/>
+                <a:ea typeface="+mn-lt"/>
+                <a:cs typeface="+mn-lt"/>
+              </a:rPr>
+              <a:t>DevOps &amp; System Architecture</a:t>
+            </a:r>
+            <a:endParaRPr lang="en-US" sz="1800" b="1" noProof="1">
+              <a:latin typeface="Times New Roman"/>
+              <a:cs typeface="Times New Roman"/>
+            </a:endParaRPr>
+          </a:p>
+          <a:p>
+            <a:r>
+              <a:rPr lang="en-US" sz="1800" b="1" noProof="1">
+                <a:latin typeface="Times New Roman"/>
+                <a:ea typeface="+mn-lt"/>
+                <a:cs typeface="+mn-lt"/>
+              </a:rPr>
+              <a:t>Automatizare &amp; Deployment</a:t>
+            </a:r>
+            <a:endParaRPr lang="en-US" sz="1800" noProof="1">
+              <a:latin typeface="Times New Roman"/>
+              <a:cs typeface="Times New Roman"/>
+            </a:endParaRPr>
+          </a:p>
+          <a:p>
+            <a:pPr lvl="1"/>
+            <a:r>
+              <a:rPr lang="en-US" sz="1800" noProof="1">
+                <a:latin typeface="Times New Roman"/>
+                <a:ea typeface="+mn-lt"/>
+                <a:cs typeface="+mn-lt"/>
+              </a:rPr>
+              <a:t>Dezvoltarea scripturilor de infrastructură (</a:t>
+            </a:r>
+            <a:r>
+              <a:rPr lang="en-US" sz="1800" noProof="1">
+                <a:latin typeface="Times New Roman"/>
+                <a:cs typeface="Times New Roman"/>
+              </a:rPr>
+              <a:t>setup.sh</a:t>
+            </a:r>
+            <a:r>
+              <a:rPr lang="en-US" sz="1800" noProof="1">
+                <a:latin typeface="Times New Roman"/>
+                <a:ea typeface="+mn-lt"/>
+                <a:cs typeface="+mn-lt"/>
+              </a:rPr>
+              <a:t>) pentru integrarea automată în sistem.</a:t>
+            </a:r>
+            <a:endParaRPr lang="en-US" sz="1800" noProof="1">
+              <a:latin typeface="Times New Roman"/>
+              <a:cs typeface="Times New Roman"/>
+            </a:endParaRPr>
+          </a:p>
+          <a:p>
+            <a:r>
+              <a:rPr lang="en-US" sz="1800" b="1" noProof="1">
+                <a:latin typeface="Times New Roman"/>
+                <a:ea typeface="+mn-lt"/>
+                <a:cs typeface="+mn-lt"/>
+              </a:rPr>
+              <a:t>Managementul Proceselor (Cron)</a:t>
+            </a:r>
+            <a:endParaRPr lang="en-US" sz="1800" noProof="1">
+              <a:latin typeface="Times New Roman"/>
+              <a:cs typeface="Times New Roman"/>
+            </a:endParaRPr>
+          </a:p>
+          <a:p>
+            <a:pPr lvl="1"/>
+            <a:r>
+              <a:rPr lang="en-US" sz="1800" noProof="1">
+                <a:latin typeface="Times New Roman"/>
+                <a:ea typeface="+mn-lt"/>
+                <a:cs typeface="+mn-lt"/>
+              </a:rPr>
+              <a:t>Configurarea planificatorului de sarcini (Cron Jobs) și optimizarea permisiunilor de execuție (</a:t>
+            </a:r>
+            <a:r>
+              <a:rPr lang="en-US" sz="1800" noProof="1">
+                <a:latin typeface="Times New Roman"/>
+                <a:cs typeface="Times New Roman"/>
+              </a:rPr>
+              <a:t>chmod</a:t>
+            </a:r>
+            <a:r>
+              <a:rPr lang="en-US" sz="1800" noProof="1">
+                <a:latin typeface="Times New Roman"/>
+                <a:ea typeface="+mn-lt"/>
+                <a:cs typeface="+mn-lt"/>
+              </a:rPr>
+              <a:t>, </a:t>
+            </a:r>
+            <a:r>
+              <a:rPr lang="en-US" sz="1800" noProof="1">
+                <a:latin typeface="Times New Roman"/>
+                <a:cs typeface="Times New Roman"/>
+              </a:rPr>
+              <a:t>symlinks</a:t>
+            </a:r>
+            <a:r>
+              <a:rPr lang="en-US" sz="1800" noProof="1">
+                <a:latin typeface="Times New Roman"/>
+                <a:ea typeface="+mn-lt"/>
+                <a:cs typeface="+mn-lt"/>
+              </a:rPr>
+              <a:t>).</a:t>
+            </a:r>
+            <a:endParaRPr lang="en-US" sz="1800" noProof="1">
+              <a:latin typeface="Times New Roman"/>
+              <a:cs typeface="Times New Roman"/>
+            </a:endParaRPr>
+          </a:p>
+          <a:p>
+            <a:r>
+              <a:rPr lang="en-US" sz="1800" b="1" noProof="1">
+                <a:latin typeface="Times New Roman"/>
+                <a:ea typeface="+mn-lt"/>
+                <a:cs typeface="+mn-lt"/>
+              </a:rPr>
+              <a:t>Error Handling</a:t>
+            </a:r>
+            <a:endParaRPr lang="en-US" sz="1800" noProof="1">
+              <a:latin typeface="Times New Roman"/>
+              <a:cs typeface="Times New Roman"/>
+            </a:endParaRPr>
+          </a:p>
+          <a:p>
+            <a:pPr lvl="1"/>
+            <a:r>
+              <a:rPr lang="en-US" sz="1800" noProof="1">
+                <a:latin typeface="Times New Roman"/>
+                <a:ea typeface="+mn-lt"/>
+                <a:cs typeface="+mn-lt"/>
+              </a:rPr>
+              <a:t>Implementarea standardelor de validare a fișierelor și a mecanismelor de siguranță ("Fail-Fast") pentru stabilitatea sistemului.</a:t>
+            </a:r>
+            <a:endParaRPr lang="en-US" sz="1800" noProof="1">
+              <a:latin typeface="Times New Roman"/>
+              <a:cs typeface="Times New Roman"/>
+            </a:endParaRPr>
+          </a:p>
+          <a:p>
+            <a:endParaRPr lang="en-US" sz="1800" noProof="1">
+              <a:latin typeface="Times New Roman"/>
+              <a:cs typeface="Times New Roman"/>
+            </a:endParaRPr>
+          </a:p>
+        </p:txBody>
+      </p:sp>
+      <p:sp>
+        <p:nvSpPr>
+          <p:cNvPr id="2" name="Date Placeholder 1">
+            <a:extLst>
+              <a:ext uri="{FF2B5EF4-FFF2-40B4-BE49-F238E27FC236}">
+                <a16:creationId xmlns:a16="http://schemas.microsoft.com/office/drawing/2014/main" id="{9279EA2D-D8BB-77DA-E825-A89AEC04B443}"/>
+              </a:ext>
+            </a:extLst>
+          </p:cNvPr>
+          <p:cNvSpPr>
+            <a:spLocks noGrp="1"/>
+          </p:cNvSpPr>
+          <p:nvPr>
+            <p:ph type="dt" sz="half" idx="10"/>
+          </p:nvPr>
+        </p:nvSpPr>
+        <p:spPr/>
+        <p:txBody>
+          <a:bodyPr/>
+          <a:lstStyle/>
+          <a:p>
+            <a:fld id="{82D88A62-8B5D-4484-AFD5-4AC4BA98C3F5}" type="datetime1">
+              <a:t>1/14/2026</a:t>
+            </a:fld>
+            <a:endParaRPr lang="en-US"/>
+          </a:p>
+        </p:txBody>
+      </p:sp>
+      <p:sp>
+        <p:nvSpPr>
+          <p:cNvPr id="3" name="Footer Placeholder 2">
+            <a:extLst>
+              <a:ext uri="{FF2B5EF4-FFF2-40B4-BE49-F238E27FC236}">
+                <a16:creationId xmlns:a16="http://schemas.microsoft.com/office/drawing/2014/main" id="{9759FA3B-7201-FA4B-D16F-EF9900FD7E32}"/>
+              </a:ext>
+            </a:extLst>
+          </p:cNvPr>
+          <p:cNvSpPr>
+            <a:spLocks noGrp="1"/>
+          </p:cNvSpPr>
+          <p:nvPr>
+            <p:ph type="ftr" sz="quarter" idx="11"/>
+          </p:nvPr>
+        </p:nvSpPr>
+        <p:spPr/>
+        <p:txBody>
+          <a:bodyPr/>
+          <a:lstStyle/>
+          <a:p>
+            <a:r>
+              <a:rPr lang="en-US"/>
+              <a:t>
+              </a:t>
+            </a:r>
+          </a:p>
+        </p:txBody>
+      </p:sp>
+      <p:sp>
+        <p:nvSpPr>
+          <p:cNvPr id="4" name="Slide Number Placeholder 3">
+            <a:extLst>
+              <a:ext uri="{FF2B5EF4-FFF2-40B4-BE49-F238E27FC236}">
+                <a16:creationId xmlns:a16="http://schemas.microsoft.com/office/drawing/2014/main" id="{A28978ED-A9DE-0255-2014-BE819F45B85A}"/>
+              </a:ext>
+            </a:extLst>
+          </p:cNvPr>
+          <p:cNvSpPr>
+            <a:spLocks noGrp="1"/>
+          </p:cNvSpPr>
+          <p:nvPr>
+            <p:ph type="sldNum" sz="quarter" idx="12"/>
+          </p:nvPr>
+        </p:nvSpPr>
+        <p:spPr/>
+        <p:txBody>
+          <a:bodyPr/>
+          <a:lstStyle/>
+          <a:p>
+            <a:fld id="{5E4DE196-8A13-4FF7-A07E-102851959EAB}" type="slidenum">
+              <a:rPr lang="en-US" dirty="0"/>
+              <a:t>12</a:t>
+            </a:fld>
+            <a:endParaRPr lang="en-US"/>
+          </a:p>
+        </p:txBody>
+      </p:sp>
+    </p:spTree>
+    <p:extLst>
+      <p:ext uri="{BB962C8B-B14F-4D97-AF65-F5344CB8AC3E}">
+        <p14:creationId xmlns:p14="http://schemas.microsoft.com/office/powerpoint/2010/main" val="3724819114"/>
+      </p:ext>
+    </p:extLst>
+  </p:cSld>
+  <p:clrMapOvr>
+    <a:masterClrMapping/>
+  </p:clrMapOvr>
+</p:sld>
+</file>
+
 <file path=ppt/slides/slide2.xml><?xml version="1.0" encoding="utf-8"?>
 <p:sld xmlns:a="http://schemas.openxmlformats.org/drawingml/2006/main" xmlns:r="http://schemas.openxmlformats.org/officeDocument/2006/relationships" xmlns:p="http://schemas.openxmlformats.org/presentationml/2006/main">
   <p:cSld>

--- a/itbi_packagelog.pptx
+++ b/itbi_packagelog.pptx
@@ -123,6 +123,7 @@
   <p1510:revLst>
     <p1510:client id="{1B6B34B3-CDA6-4935-8B7A-485047854E96}" v="214" dt="2026-01-14T10:06:44.768"/>
     <p1510:client id="{67097E2A-E7A9-4499-896D-4BD9E287EED2}" v="516" dt="2026-01-14T09:29:19.010"/>
+    <p1510:client id="{6D1B035C-0327-9B46-297E-4DE2BC139AE2}" v="21" dt="2026-01-15T10:05:47.117"/>
     <p1510:client id="{8083A0F2-655A-4916-9933-910783F721A3}" v="18" dt="2026-01-14T10:09:57.098"/>
     <p1510:client id="{D0BF7559-4C89-5C82-5003-EED3936F30E6}" v="63" dt="2026-01-14T19:35:19.599"/>
   </p1510:revLst>
@@ -131,6 +132,60 @@
 
 <file path=ppt/changesInfos/changesInfo1.xml><?xml version="1.0" encoding="utf-8"?>
 <pc:chgInfo xmlns:a="http://schemas.openxmlformats.org/drawingml/2006/main" xmlns:r="http://schemas.openxmlformats.org/officeDocument/2006/relationships" xmlns:ac="http://schemas.microsoft.com/office/drawing/2013/main/command" xmlns:pc="http://schemas.microsoft.com/office/powerpoint/2013/main/command">
+  <pc:docChgLst>
+    <pc:chgData name="Gadam Gurban" userId="9fa804240d506e78" providerId="Windows Live" clId="Web-{6D1B035C-0327-9B46-297E-4DE2BC139AE2}"/>
+    <pc:docChg chg="modSld">
+      <pc:chgData name="Gadam Gurban" userId="9fa804240d506e78" providerId="Windows Live" clId="Web-{6D1B035C-0327-9B46-297E-4DE2BC139AE2}" dt="2026-01-15T10:05:47.117" v="17" actId="1076"/>
+      <pc:docMkLst>
+        <pc:docMk/>
+      </pc:docMkLst>
+      <pc:sldChg chg="modSp">
+        <pc:chgData name="Gadam Gurban" userId="9fa804240d506e78" providerId="Windows Live" clId="Web-{6D1B035C-0327-9B46-297E-4DE2BC139AE2}" dt="2026-01-15T10:05:26.273" v="11" actId="1076"/>
+        <pc:sldMkLst>
+          <pc:docMk/>
+          <pc:sldMk cId="1242800155" sldId="258"/>
+        </pc:sldMkLst>
+        <pc:spChg chg="mod">
+          <ac:chgData name="Gadam Gurban" userId="9fa804240d506e78" providerId="Windows Live" clId="Web-{6D1B035C-0327-9B46-297E-4DE2BC139AE2}" dt="2026-01-15T10:05:26.273" v="11" actId="1076"/>
+          <ac:spMkLst>
+            <pc:docMk/>
+            <pc:sldMk cId="1242800155" sldId="258"/>
+            <ac:spMk id="9" creationId="{C57D1474-4044-273B-7A81-98D774E6408E}"/>
+          </ac:spMkLst>
+        </pc:spChg>
+      </pc:sldChg>
+      <pc:sldChg chg="modSp">
+        <pc:chgData name="Gadam Gurban" userId="9fa804240d506e78" providerId="Windows Live" clId="Web-{6D1B035C-0327-9B46-297E-4DE2BC139AE2}" dt="2026-01-15T10:05:07.975" v="5" actId="1076"/>
+        <pc:sldMkLst>
+          <pc:docMk/>
+          <pc:sldMk cId="3309823951" sldId="260"/>
+        </pc:sldMkLst>
+        <pc:spChg chg="mod">
+          <ac:chgData name="Gadam Gurban" userId="9fa804240d506e78" providerId="Windows Live" clId="Web-{6D1B035C-0327-9B46-297E-4DE2BC139AE2}" dt="2026-01-15T10:05:07.975" v="5" actId="1076"/>
+          <ac:spMkLst>
+            <pc:docMk/>
+            <pc:sldMk cId="3309823951" sldId="260"/>
+            <ac:spMk id="9" creationId="{A9330C9F-BD91-BBEB-3AEC-F152E524CD72}"/>
+          </ac:spMkLst>
+        </pc:spChg>
+      </pc:sldChg>
+      <pc:sldChg chg="modSp">
+        <pc:chgData name="Gadam Gurban" userId="9fa804240d506e78" providerId="Windows Live" clId="Web-{6D1B035C-0327-9B46-297E-4DE2BC139AE2}" dt="2026-01-15T10:05:47.117" v="17" actId="1076"/>
+        <pc:sldMkLst>
+          <pc:docMk/>
+          <pc:sldMk cId="3746491774" sldId="261"/>
+        </pc:sldMkLst>
+        <pc:spChg chg="mod">
+          <ac:chgData name="Gadam Gurban" userId="9fa804240d506e78" providerId="Windows Live" clId="Web-{6D1B035C-0327-9B46-297E-4DE2BC139AE2}" dt="2026-01-15T10:05:47.117" v="17" actId="1076"/>
+          <ac:spMkLst>
+            <pc:docMk/>
+            <pc:sldMk cId="3746491774" sldId="261"/>
+            <ac:spMk id="9" creationId="{59F3A9EF-7118-A136-50E9-8D0FE55490B8}"/>
+          </ac:spMkLst>
+        </pc:spChg>
+      </pc:sldChg>
+    </pc:docChg>
+  </pc:docChgLst>
   <pc:docChgLst>
     <pc:chgData name="Gadam Gurban" userId="9fa804240d506e78" providerId="Windows Live" clId="Web-{D0BF7559-4C89-5C82-5003-EED3936F30E6}"/>
     <pc:docChg chg="addSld modSld">
@@ -1491,7 +1546,7 @@
           <a:p>
             <a:fld id="{807E39B8-A7CB-4B82-AC0C-44B99F546761}" type="datetimeFigureOut">
               <a:rPr lang="en-US" dirty="0"/>
-              <a:t>1/14/2026</a:t>
+              <a:t>1/15/2026</a:t>
             </a:fld>
             <a:endParaRPr lang="en-US"/>
           </a:p>
@@ -1709,7 +1764,7 @@
           <a:p>
             <a:fld id="{01742F6F-0846-489A-A4BC-61B476BE2887}" type="datetimeFigureOut">
               <a:rPr lang="en-US" dirty="0"/>
-              <a:t>1/14/2026</a:t>
+              <a:t>1/15/2026</a:t>
             </a:fld>
             <a:endParaRPr lang="en-US"/>
           </a:p>
@@ -1921,7 +1976,7 @@
           <a:p>
             <a:fld id="{B229DF21-A340-467A-94AB-9502647BB771}" type="datetimeFigureOut">
               <a:rPr lang="en-US" dirty="0"/>
-              <a:t>1/14/2026</a:t>
+              <a:t>1/15/2026</a:t>
             </a:fld>
             <a:endParaRPr lang="en-US"/>
           </a:p>
@@ -2123,7 +2178,7 @@
           <a:p>
             <a:fld id="{FE7E3940-CA92-4FEE-A698-62CF7BC5AC36}" type="datetimeFigureOut">
               <a:rPr lang="en-US" dirty="0"/>
-              <a:t>1/14/2026</a:t>
+              <a:t>1/15/2026</a:t>
             </a:fld>
             <a:endParaRPr lang="en-US"/>
           </a:p>
@@ -2404,7 +2459,7 @@
           <a:p>
             <a:fld id="{E33CD641-6C35-45D1-9313-2719E9EA8AD8}" type="datetimeFigureOut">
               <a:rPr lang="en-US" dirty="0"/>
-              <a:t>1/14/2026</a:t>
+              <a:t>1/15/2026</a:t>
             </a:fld>
             <a:endParaRPr lang="en-US"/>
           </a:p>
@@ -2673,7 +2728,7 @@
           <a:p>
             <a:fld id="{35301268-3A74-4110-8F08-063DFB8BB885}" type="datetimeFigureOut">
               <a:rPr lang="en-US" dirty="0"/>
-              <a:t>1/14/2026</a:t>
+              <a:t>1/15/2026</a:t>
             </a:fld>
             <a:endParaRPr lang="en-US"/>
           </a:p>
@@ -3093,7 +3148,7 @@
           <a:p>
             <a:fld id="{BF91C1AF-C1FB-48A7-98B4-E595E63F6614}" type="datetimeFigureOut">
               <a:rPr lang="en-US" dirty="0"/>
-              <a:t>1/14/2026</a:t>
+              <a:t>1/15/2026</a:t>
             </a:fld>
             <a:endParaRPr lang="en-US"/>
           </a:p>
@@ -3238,7 +3293,7 @@
           <a:p>
             <a:fld id="{97144C44-5F8C-4BEA-BBCE-8694F126DC43}" type="datetimeFigureOut">
               <a:rPr lang="en-US" dirty="0"/>
-              <a:t>1/14/2026</a:t>
+              <a:t>1/15/2026</a:t>
             </a:fld>
             <a:endParaRPr lang="en-US"/>
           </a:p>
@@ -3355,7 +3410,7 @@
           <a:p>
             <a:fld id="{039E56F9-C8F2-4EF7-8042-704C94FF2795}" type="datetimeFigureOut">
               <a:rPr lang="en-US" dirty="0"/>
-              <a:t>1/14/2026</a:t>
+              <a:t>1/15/2026</a:t>
             </a:fld>
             <a:endParaRPr lang="en-US"/>
           </a:p>
@@ -3674,7 +3729,7 @@
           <a:p>
             <a:fld id="{4F6932DF-953D-44BD-83F8-5D8DA76EA12A}" type="datetimeFigureOut">
               <a:rPr lang="en-US" dirty="0"/>
-              <a:t>1/14/2026</a:t>
+              <a:t>1/15/2026</a:t>
             </a:fld>
             <a:endParaRPr lang="en-US"/>
           </a:p>
@@ -3968,7 +4023,7 @@
           <a:p>
             <a:fld id="{352F326D-65F4-4B2F-9A62-9E4BD9402C47}" type="datetimeFigureOut">
               <a:rPr lang="en-US" dirty="0"/>
-              <a:t>1/14/2026</a:t>
+              <a:t>1/15/2026</a:t>
             </a:fld>
             <a:endParaRPr lang="en-US"/>
           </a:p>
@@ -4261,7 +4316,7 @@
           <a:p>
             <a:fld id="{F9B0CB28-85DB-480B-8C99-FD493ACC7120}" type="datetimeFigureOut">
               <a:rPr lang="en-US" dirty="0"/>
-              <a:t>1/14/2026</a:t>
+              <a:t>1/15/2026</a:t>
             </a:fld>
             <a:endParaRPr lang="en-US"/>
           </a:p>
@@ -4871,7 +4926,7 @@
           <a:lstStyle/>
           <a:p>
             <a:fld id="{97260B42-0B13-451A-B02C-FD413D3139BB}" type="datetime1">
-              <a:t>1/14/2026</a:t>
+              <a:t>1/15/2026</a:t>
             </a:fld>
             <a:endParaRPr lang="en-US"/>
           </a:p>
@@ -5073,7 +5128,7 @@
           <a:lstStyle/>
           <a:p>
             <a:fld id="{97260B42-0B13-451A-B02C-FD413D3139BB}" type="datetime1">
-              <a:t>1/14/2026</a:t>
+              <a:t>1/15/2026</a:t>
             </a:fld>
             <a:endParaRPr lang="en-US"/>
           </a:p>
@@ -5758,7 +5813,7 @@
           <a:lstStyle/>
           <a:p>
             <a:fld id="{82D88A62-8B5D-4484-AFD5-4AC4BA98C3F5}" type="datetime1">
-              <a:t>1/14/2026</a:t>
+              <a:t>1/15/2026</a:t>
             </a:fld>
             <a:endParaRPr lang="en-US"/>
           </a:p>
@@ -6015,7 +6070,7 @@
           <a:lstStyle/>
           <a:p>
             <a:fld id="{ADBAD4F3-1D35-4D2A-820B-FBF714385AAA}" type="datetime1">
-              <a:t>1/14/2026</a:t>
+              <a:t>1/15/2026</a:t>
             </a:fld>
             <a:endParaRPr lang="en-US"/>
           </a:p>
@@ -6131,7 +6186,7 @@
           <a:lstStyle/>
           <a:p>
             <a:fld id="{F08484A4-D2B4-464A-A7A7-CC47476E9548}" type="datetime1">
-              <a:t>1/14/2026</a:t>
+              <a:t>1/15/2026</a:t>
             </a:fld>
             <a:endParaRPr lang="en-US"/>
           </a:p>
@@ -6209,8 +6264,8 @@
         </p:nvSpPr>
         <p:spPr>
           <a:xfrm>
-            <a:off x="782594" y="453082"/>
-            <a:ext cx="10431161" cy="5632311"/>
+            <a:off x="883447" y="979758"/>
+            <a:ext cx="10431161" cy="4893647"/>
           </a:xfrm>
           <a:prstGeom prst="rect">
             <a:avLst/>
@@ -6226,21 +6281,6 @@
           </a:bodyPr>
           <a:lstStyle/>
           <a:p>
-            <a:r>
-              <a:rPr lang="en-US" sz="2400" i="1" noProof="1">
-                <a:latin typeface="Times New Roman"/>
-                <a:cs typeface="Times New Roman"/>
-              </a:rPr>
-              <a:t>Acest slide explică cum transformăm datele brute din loguri în informații utile.</a:t>
-            </a:r>
-          </a:p>
-          <a:p>
-            <a:endParaRPr lang="en-US" sz="2400" i="1" noProof="1">
-              <a:latin typeface="Times New Roman"/>
-              <a:cs typeface="Times New Roman"/>
-            </a:endParaRPr>
-          </a:p>
-          <a:p>
             <a:pPr marL="342900" indent="-342900">
               <a:buFont typeface="Arial"/>
               <a:buChar char="•"/>
@@ -6252,6 +6292,7 @@
               </a:rPr>
               <a:t>awk (Motor de Procesare Text):</a:t>
             </a:r>
+            <a:endParaRPr lang="en-US" dirty="0"/>
           </a:p>
           <a:p>
             <a:pPr marL="800100" lvl="2" indent="-342900">
@@ -6443,7 +6484,7 @@
           <a:lstStyle/>
           <a:p>
             <a:fld id="{F08484A4-D2B4-464A-A7A7-CC47476E9548}" type="datetime1">
-              <a:t>1/14/2026</a:t>
+              <a:t>1/15/2026</a:t>
             </a:fld>
             <a:endParaRPr lang="en-US"/>
           </a:p>
@@ -6521,8 +6562,8 @@
         </p:nvSpPr>
         <p:spPr>
           <a:xfrm>
-            <a:off x="782594" y="453082"/>
-            <a:ext cx="10431161" cy="4524315"/>
+            <a:off x="715359" y="1551258"/>
+            <a:ext cx="10431161" cy="3416320"/>
           </a:xfrm>
           <a:prstGeom prst="rect">
             <a:avLst/>
@@ -6538,27 +6579,6 @@
           </a:bodyPr>
           <a:lstStyle/>
           <a:p>
-            <a:r>
-              <a:rPr lang="en-US" sz="2400" i="1" noProof="1">
-                <a:latin typeface="Times New Roman"/>
-                <a:ea typeface="+mn-lt"/>
-                <a:cs typeface="+mn-lt"/>
-              </a:rPr>
-              <a:t>Acest slide explică cum funcționează scriptul în fundal fără intervenția utilizatorului.</a:t>
-            </a:r>
-            <a:endParaRPr lang="en-US" noProof="1">
-              <a:latin typeface="Times New Roman"/>
-              <a:ea typeface="+mn-lt"/>
-              <a:cs typeface="+mn-lt"/>
-            </a:endParaRPr>
-          </a:p>
-          <a:p>
-            <a:endParaRPr lang="en-US" sz="2400" i="1" noProof="1">
-              <a:latin typeface="Times New Roman"/>
-              <a:cs typeface="Times New Roman"/>
-            </a:endParaRPr>
-          </a:p>
-          <a:p>
             <a:pPr marL="342900" indent="-342900">
               <a:buFont typeface="Arial"/>
               <a:buChar char="•"/>
@@ -6601,6 +6621,7 @@
               </a:rPr>
               <a:t>:</a:t>
             </a:r>
+            <a:endParaRPr lang="en-US" dirty="0"/>
           </a:p>
           <a:p>
             <a:pPr marL="800100" lvl="2" indent="-342900">
@@ -6788,7 +6809,7 @@
           <a:lstStyle/>
           <a:p>
             <a:fld id="{F08484A4-D2B4-464A-A7A7-CC47476E9548}" type="datetime1">
-              <a:t>1/14/2026</a:t>
+              <a:t>1/15/2026</a:t>
             </a:fld>
             <a:endParaRPr lang="en-US"/>
           </a:p>
@@ -6866,8 +6887,8 @@
         </p:nvSpPr>
         <p:spPr>
           <a:xfrm>
-            <a:off x="782594" y="453082"/>
-            <a:ext cx="10431161" cy="4154984"/>
+            <a:off x="883447" y="1528847"/>
+            <a:ext cx="10431161" cy="3046988"/>
           </a:xfrm>
           <a:prstGeom prst="rect">
             <a:avLst/>
@@ -6883,27 +6904,6 @@
           </a:bodyPr>
           <a:lstStyle/>
           <a:p>
-            <a:r>
-              <a:rPr lang="en-US" sz="2400" i="1" noProof="1">
-                <a:latin typeface="Times New Roman"/>
-                <a:ea typeface="+mn-lt"/>
-                <a:cs typeface="+mn-lt"/>
-              </a:rPr>
-              <a:t>Acest slide demonstrează că proiectul este un utilitar CLI profesional, nu doar un simplu script.</a:t>
-            </a:r>
-            <a:endParaRPr lang="en-US" sz="2400" noProof="1">
-              <a:latin typeface="Times New Roman"/>
-              <a:ea typeface="+mn-lt"/>
-              <a:cs typeface="+mn-lt"/>
-            </a:endParaRPr>
-          </a:p>
-          <a:p>
-            <a:endParaRPr lang="en-US" sz="2400" i="1" noProof="1">
-              <a:latin typeface="Times New Roman"/>
-              <a:cs typeface="Times New Roman"/>
-            </a:endParaRPr>
-          </a:p>
-          <a:p>
             <a:pPr marL="342900" indent="-342900">
               <a:buFont typeface="Arial"/>
               <a:buChar char="•"/>
@@ -6916,6 +6916,7 @@
               </a:rPr>
               <a:t>Legături Simbolice (Symlinks - ln -s):</a:t>
             </a:r>
+            <a:endParaRPr lang="en-US" dirty="0"/>
           </a:p>
           <a:p>
             <a:pPr marL="800100" lvl="2" indent="-342900">
@@ -7067,7 +7068,7 @@
           <a:lstStyle/>
           <a:p>
             <a:fld id="{4BB8A4B6-686A-42D3-87B0-2ACF4AC27362}" type="datetime1">
-              <a:t>1/14/2026</a:t>
+              <a:t>1/15/2026</a:t>
             </a:fld>
             <a:endParaRPr lang="en-US"/>
           </a:p>
@@ -7358,7 +7359,7 @@
           <a:lstStyle/>
           <a:p>
             <a:fld id="{97260B42-0B13-451A-B02C-FD413D3139BB}" type="datetime1">
-              <a:t>1/14/2026</a:t>
+              <a:t>1/15/2026</a:t>
             </a:fld>
             <a:endParaRPr lang="en-US"/>
           </a:p>
@@ -7560,7 +7561,7 @@
           <a:lstStyle/>
           <a:p>
             <a:fld id="{97260B42-0B13-451A-B02C-FD413D3139BB}" type="datetime1">
-              <a:t>1/14/2026</a:t>
+              <a:t>1/15/2026</a:t>
             </a:fld>
             <a:endParaRPr lang="en-US"/>
           </a:p>
@@ -7762,7 +7763,7 @@
           <a:lstStyle/>
           <a:p>
             <a:fld id="{97260B42-0B13-451A-B02C-FD413D3139BB}" type="datetime1">
-              <a:t>1/14/2026</a:t>
+              <a:t>1/15/2026</a:t>
             </a:fld>
             <a:endParaRPr lang="en-US"/>
           </a:p>
